--- a/static/downloads/income-streams/SuperAdPro-4-Income-Streams-PL.pptx
+++ b/static/downloads/income-streams/SuperAdPro-4-Income-Streams-PL.pptx
@@ -2293,7 +2293,7 @@
                 <a:ea typeface="Arial" pitchFamily="34" charset="-122"/>
                 <a:cs typeface="Arial" pitchFamily="34" charset="-120"/>
               </a:rPr>
-              <a:t>Do $103 976</a:t>
+              <a:t>Teoretyczne maksimum: $103 976*</a:t>
             </a:r>
             <a:endParaRPr lang="en-US" sz="850" dirty="0"/>
           </a:p>
@@ -2483,7 +2483,7 @@
                 <a:ea typeface="Arial" pitchFamily="34" charset="-122"/>
                 <a:cs typeface="Arial" pitchFamily="34" charset="-120"/>
               </a:rPr>
-              <a:t>Nieograniczone</a:t>
+              <a:t>Zmienne</a:t>
             </a:r>
             <a:endParaRPr lang="en-US" sz="850" dirty="0"/>
           </a:p>
@@ -6709,7 +6709,7 @@
                 <a:ea typeface="Arial" pitchFamily="34" charset="-122"/>
                 <a:cs typeface="Arial" pitchFamily="34" charset="-120"/>
               </a:rPr>
-              <a:t>Zapełnij 64 pozycje, bonus. Siatka się resetuje — nieograniczony dochód cykliczny.</a:t>
+              <a:t>Zapełnij 64 pozycje, bonus. Siatka się resetuje — dochód cykliczny dopóki członkowie są aktywni.</a:t>
             </a:r>
             <a:endParaRPr lang="en-US" sz="850" dirty="0"/>
           </a:p>
@@ -6775,7 +6775,7 @@
                 <a:ea typeface="Arial" pitchFamily="34" charset="-122"/>
                 <a:cs typeface="Arial" pitchFamily="34" charset="-120"/>
               </a:rPr>
-              <a:t>Do $103 976</a:t>
+              <a:t>Teoretyczne maksimum: $103 976*</a:t>
             </a:r>
             <a:pPr algn="ctr" indent="0" marL="0">
               <a:buNone/>
@@ -13159,7 +13159,7 @@
                 <a:ea typeface="Arial" pitchFamily="34" charset="-122"/>
                 <a:cs typeface="Arial" pitchFamily="34" charset="-120"/>
               </a:rPr>
-              <a:t>Nieograniczone</a:t>
+              <a:t>Zmienne</a:t>
             </a:r>
             <a:pPr algn="ctr" indent="0" marL="0">
               <a:buNone/>
